--- a/test-corpus/word-verification/zenuml.pptx
+++ b/test-corpus/word-verification/zenuml.pptx
@@ -144,7 +144,7 @@
         </p:nvSpPr>
         <p:spPr>
           <a:xfrm>
-            <a:off x="3544758" y="1298316"/>
+            <a:off x="1423350" y="1298316"/>
             <a:ext cx="606636" cy="229174"/>
           </a:xfrm>
           <a:prstGeom prst="rect">
@@ -168,7 +168,7 @@
         </p:nvSpPr>
         <p:spPr>
           <a:xfrm>
-            <a:off x="3544758" y="6036818"/>
+            <a:off x="1423350" y="6036818"/>
             <a:ext cx="606636" cy="229174"/>
           </a:xfrm>
           <a:prstGeom prst="rect">
@@ -192,7 +192,7 @@
         </p:nvSpPr>
         <p:spPr>
           <a:xfrm>
-            <a:off x="4488414" y="1298316"/>
+            <a:off x="2367006" y="1298316"/>
             <a:ext cx="606636" cy="229174"/>
           </a:xfrm>
           <a:prstGeom prst="rect">
@@ -216,7 +216,7 @@
         </p:nvSpPr>
         <p:spPr>
           <a:xfrm>
-            <a:off x="4488414" y="6036818"/>
+            <a:off x="2367006" y="6036818"/>
             <a:ext cx="606636" cy="229174"/>
           </a:xfrm>
           <a:prstGeom prst="rect">
@@ -240,7 +240,7 @@
         </p:nvSpPr>
         <p:spPr>
           <a:xfrm>
-            <a:off x="5432070" y="1298316"/>
+            <a:off x="3310662" y="1298316"/>
             <a:ext cx="606636" cy="229174"/>
           </a:xfrm>
           <a:prstGeom prst="rect">
@@ -264,7 +264,7 @@
         </p:nvSpPr>
         <p:spPr>
           <a:xfrm>
-            <a:off x="5432070" y="6036818"/>
+            <a:off x="3310662" y="6036818"/>
             <a:ext cx="606636" cy="229174"/>
           </a:xfrm>
           <a:prstGeom prst="rect">
@@ -288,7 +288,7 @@
         </p:nvSpPr>
         <p:spPr>
           <a:xfrm>
-            <a:off x="6268217" y="1298316"/>
+            <a:off x="4146809" y="1298316"/>
             <a:ext cx="821655" cy="229174"/>
           </a:xfrm>
           <a:prstGeom prst="rect">
@@ -312,7 +312,7 @@
         </p:nvSpPr>
         <p:spPr>
           <a:xfrm>
-            <a:off x="6268217" y="6036818"/>
+            <a:off x="4146809" y="6036818"/>
             <a:ext cx="821655" cy="229174"/>
           </a:xfrm>
           <a:prstGeom prst="rect">
@@ -336,7 +336,7 @@
         </p:nvSpPr>
         <p:spPr>
           <a:xfrm>
-            <a:off x="7319383" y="3071042"/>
+            <a:off x="5197975" y="3071042"/>
             <a:ext cx="606636" cy="229174"/>
           </a:xfrm>
           <a:prstGeom prst="rect">
@@ -360,7 +360,7 @@
         </p:nvSpPr>
         <p:spPr>
           <a:xfrm>
-            <a:off x="7319383" y="6036818"/>
+            <a:off x="5197975" y="6036818"/>
             <a:ext cx="606636" cy="229174"/>
           </a:xfrm>
           <a:prstGeom prst="rect">
@@ -384,7 +384,7 @@
         </p:nvSpPr>
         <p:spPr>
           <a:xfrm>
-            <a:off x="4549078" y="2397002"/>
+            <a:off x="2427670" y="2397002"/>
             <a:ext cx="3316278" cy="1354821"/>
           </a:xfrm>
           <a:prstGeom prst="rect">
@@ -406,7 +406,7 @@
         </p:nvSpPr>
         <p:spPr>
           <a:xfrm>
-            <a:off x="4549078" y="2397002"/>
+            <a:off x="2427670" y="2397002"/>
             <a:ext cx="229174" cy="107846"/>
           </a:xfrm>
           <a:prstGeom prst="rect">
@@ -452,7 +452,7 @@
         </p:nvSpPr>
         <p:spPr>
           <a:xfrm>
-            <a:off x="4818694" y="2397002"/>
+            <a:off x="2697286" y="2397002"/>
             <a:ext cx="3006219" cy="107846"/>
           </a:xfrm>
           <a:prstGeom prst="rect">
@@ -494,7 +494,7 @@
         </p:nvCxnSpPr>
         <p:spPr>
           <a:xfrm>
-            <a:off x="4549078" y="3367619"/>
+            <a:off x="2427670" y="3367619"/>
             <a:ext cx="3316277" cy="1"/>
           </a:xfrm>
           <a:prstGeom prst="line">
@@ -516,7 +516,7 @@
         </p:nvSpPr>
         <p:spPr>
           <a:xfrm>
-            <a:off x="4589520" y="3381100"/>
+            <a:off x="2468112" y="3381100"/>
             <a:ext cx="3235393" cy="94366"/>
           </a:xfrm>
           <a:prstGeom prst="rect">
@@ -558,7 +558,7 @@
         </p:nvSpPr>
         <p:spPr>
           <a:xfrm>
-            <a:off x="5492734" y="3846188"/>
+            <a:off x="3371326" y="3846188"/>
             <a:ext cx="1428965" cy="411164"/>
           </a:xfrm>
           <a:prstGeom prst="rect">
@@ -580,7 +580,7 @@
         </p:nvSpPr>
         <p:spPr>
           <a:xfrm>
-            <a:off x="5492734" y="3846188"/>
+            <a:off x="3371326" y="3846188"/>
             <a:ext cx="269616" cy="107846"/>
           </a:xfrm>
           <a:prstGeom prst="rect">
@@ -626,7 +626,7 @@
         </p:nvSpPr>
         <p:spPr>
           <a:xfrm>
-            <a:off x="5802793" y="3846188"/>
+            <a:off x="3681385" y="3846188"/>
             <a:ext cx="1078464" cy="107846"/>
           </a:xfrm>
           <a:prstGeom prst="rect">
@@ -668,7 +668,7 @@
         </p:nvSpPr>
         <p:spPr>
           <a:xfrm>
-            <a:off x="4549078" y="4587632"/>
+            <a:off x="2427670" y="4587632"/>
             <a:ext cx="2372621" cy="808848"/>
           </a:xfrm>
           <a:prstGeom prst="rect">
@@ -690,7 +690,7 @@
         </p:nvSpPr>
         <p:spPr>
           <a:xfrm>
-            <a:off x="4549078" y="4587632"/>
+            <a:off x="2427670" y="4587632"/>
             <a:ext cx="310058" cy="107846"/>
           </a:xfrm>
           <a:prstGeom prst="rect">
@@ -736,7 +736,7 @@
         </p:nvSpPr>
         <p:spPr>
           <a:xfrm>
-            <a:off x="4899579" y="4587632"/>
+            <a:off x="2778171" y="4587632"/>
             <a:ext cx="1981678" cy="107846"/>
           </a:xfrm>
           <a:prstGeom prst="rect">
@@ -778,7 +778,7 @@
         </p:nvCxnSpPr>
         <p:spPr>
           <a:xfrm>
-            <a:off x="4549078" y="5012277"/>
+            <a:off x="2427670" y="5012277"/>
             <a:ext cx="2372621" cy="1"/>
           </a:xfrm>
           <a:prstGeom prst="line">
@@ -800,7 +800,7 @@
         </p:nvSpPr>
         <p:spPr>
           <a:xfrm>
-            <a:off x="4589520" y="5025758"/>
+            <a:off x="2468112" y="5025758"/>
             <a:ext cx="2291737" cy="94366"/>
           </a:xfrm>
           <a:prstGeom prst="rect">
@@ -842,7 +842,7 @@
         </p:nvSpPr>
         <p:spPr>
           <a:xfrm>
-            <a:off x="3605422" y="5490846"/>
+            <a:off x="1484014" y="5490846"/>
             <a:ext cx="3316278" cy="411164"/>
           </a:xfrm>
           <a:prstGeom prst="rect">
@@ -864,7 +864,7 @@
         </p:nvSpPr>
         <p:spPr>
           <a:xfrm>
-            <a:off x="3605422" y="5490846"/>
+            <a:off x="1484014" y="5490846"/>
             <a:ext cx="229174" cy="107846"/>
           </a:xfrm>
           <a:prstGeom prst="rect">
@@ -910,7 +910,7 @@
         </p:nvCxnSpPr>
         <p:spPr>
           <a:xfrm>
-            <a:off x="3848076" y="1527490"/>
+            <a:off x="1726668" y="1527490"/>
             <a:ext cx="1" cy="4509328"/>
           </a:xfrm>
           <a:prstGeom prst="line">
@@ -932,7 +932,7 @@
         </p:nvCxnSpPr>
         <p:spPr>
           <a:xfrm>
-            <a:off x="4791732" y="1527490"/>
+            <a:off x="2670324" y="1527490"/>
             <a:ext cx="1" cy="4509328"/>
           </a:xfrm>
           <a:prstGeom prst="line">
@@ -954,7 +954,7 @@
         </p:nvCxnSpPr>
         <p:spPr>
           <a:xfrm>
-            <a:off x="5735389" y="1527490"/>
+            <a:off x="3613981" y="1527490"/>
             <a:ext cx="1" cy="4509328"/>
           </a:xfrm>
           <a:prstGeom prst="line">
@@ -976,7 +976,7 @@
         </p:nvCxnSpPr>
         <p:spPr>
           <a:xfrm>
-            <a:off x="6679045" y="1527490"/>
+            <a:off x="4557637" y="1527490"/>
             <a:ext cx="1" cy="4509328"/>
           </a:xfrm>
           <a:prstGeom prst="line">
@@ -998,7 +998,7 @@
         </p:nvCxnSpPr>
         <p:spPr>
           <a:xfrm>
-            <a:off x="7622701" y="3300215"/>
+            <a:off x="5501293" y="3300215"/>
             <a:ext cx="1" cy="2736603"/>
           </a:xfrm>
           <a:prstGeom prst="line">
@@ -1020,7 +1020,7 @@
         </p:nvSpPr>
         <p:spPr>
           <a:xfrm>
-            <a:off x="5701687" y="2066722"/>
+            <a:off x="3580279" y="2066722"/>
             <a:ext cx="67404" cy="276356"/>
           </a:xfrm>
           <a:prstGeom prst="rect">
@@ -1044,7 +1044,7 @@
         </p:nvSpPr>
         <p:spPr>
           <a:xfrm>
-            <a:off x="6645343" y="1830808"/>
+            <a:off x="4523935" y="1830808"/>
             <a:ext cx="67404" cy="2702901"/>
           </a:xfrm>
           <a:prstGeom prst="rect">
@@ -1068,7 +1068,7 @@
         </p:nvSpPr>
         <p:spPr>
           <a:xfrm>
-            <a:off x="3409950" y="1069142"/>
+            <a:off x="1288542" y="1069142"/>
             <a:ext cx="4650877" cy="121327"/>
           </a:xfrm>
           <a:prstGeom prst="rect">
@@ -1110,7 +1110,7 @@
         </p:nvCxnSpPr>
         <p:spPr>
           <a:xfrm>
-            <a:off x="4791732" y="1830808"/>
+            <a:off x="2670324" y="1830808"/>
             <a:ext cx="1853611" cy="1"/>
           </a:xfrm>
           <a:prstGeom prst="line">
@@ -1133,7 +1133,7 @@
         </p:nvSpPr>
         <p:spPr>
           <a:xfrm>
-            <a:off x="4818694" y="1689259"/>
+            <a:off x="2697286" y="1689259"/>
             <a:ext cx="1799687" cy="87625"/>
           </a:xfrm>
           <a:prstGeom prst="rect">
@@ -1175,7 +1175,7 @@
         </p:nvCxnSpPr>
         <p:spPr>
           <a:xfrm flipH="1">
-            <a:off x="5769091" y="2066722"/>
+            <a:off x="3647683" y="2066722"/>
             <a:ext cx="876252" cy="1"/>
           </a:xfrm>
           <a:prstGeom prst="line">
@@ -1198,7 +1198,7 @@
         </p:nvSpPr>
         <p:spPr>
           <a:xfrm>
-            <a:off x="5796052" y="1925173"/>
+            <a:off x="3674644" y="1925173"/>
             <a:ext cx="822329" cy="87625"/>
           </a:xfrm>
           <a:prstGeom prst="rect">
@@ -1240,7 +1240,7 @@
         </p:nvCxnSpPr>
         <p:spPr>
           <a:xfrm>
-            <a:off x="5769091" y="2302636"/>
+            <a:off x="3647683" y="2302636"/>
             <a:ext cx="876252" cy="1"/>
           </a:xfrm>
           <a:prstGeom prst="line">
@@ -1263,7 +1263,7 @@
         </p:nvSpPr>
         <p:spPr>
           <a:xfrm>
-            <a:off x="5796052" y="2161087"/>
+            <a:off x="3674644" y="2161087"/>
             <a:ext cx="822329" cy="87625"/>
           </a:xfrm>
           <a:prstGeom prst="rect">
@@ -1305,7 +1305,7 @@
         </p:nvCxnSpPr>
         <p:spPr>
           <a:xfrm flipH="1">
-            <a:off x="5735389" y="2713800"/>
+            <a:off x="3613981" y="2713800"/>
             <a:ext cx="909954" cy="1"/>
           </a:xfrm>
           <a:prstGeom prst="line">
@@ -1328,7 +1328,7 @@
         </p:nvSpPr>
         <p:spPr>
           <a:xfrm>
-            <a:off x="5762350" y="2572252"/>
+            <a:off x="3640942" y="2572252"/>
             <a:ext cx="856031" cy="87625"/>
           </a:xfrm>
           <a:prstGeom prst="rect">
@@ -1370,7 +1370,7 @@
         </p:nvCxnSpPr>
         <p:spPr>
           <a:xfrm>
-            <a:off x="5735389" y="2949714"/>
+            <a:off x="3613981" y="2949714"/>
             <a:ext cx="909954" cy="1"/>
           </a:xfrm>
           <a:prstGeom prst="line">
@@ -1393,7 +1393,7 @@
         </p:nvSpPr>
         <p:spPr>
           <a:xfrm>
-            <a:off x="5762350" y="2808166"/>
+            <a:off x="3640942" y="2808166"/>
             <a:ext cx="856031" cy="87625"/>
           </a:xfrm>
           <a:prstGeom prst="rect">
@@ -1435,7 +1435,7 @@
         </p:nvCxnSpPr>
         <p:spPr>
           <a:xfrm>
-            <a:off x="6712747" y="3185628"/>
+            <a:off x="4591339" y="3185628"/>
             <a:ext cx="606636" cy="1"/>
           </a:xfrm>
           <a:prstGeom prst="line">
@@ -1458,7 +1458,7 @@
         </p:nvSpPr>
         <p:spPr>
           <a:xfrm>
-            <a:off x="6685111" y="3044080"/>
+            <a:off x="4563703" y="3044080"/>
             <a:ext cx="661907" cy="87625"/>
           </a:xfrm>
           <a:prstGeom prst="rect">
@@ -1500,7 +1500,7 @@
         </p:nvCxnSpPr>
         <p:spPr>
           <a:xfrm flipH="1">
-            <a:off x="4791732" y="3657457"/>
+            <a:off x="2670324" y="3657457"/>
             <a:ext cx="1853611" cy="1"/>
           </a:xfrm>
           <a:prstGeom prst="line">
@@ -1523,7 +1523,7 @@
         </p:nvSpPr>
         <p:spPr>
           <a:xfrm>
-            <a:off x="4818694" y="3515908"/>
+            <a:off x="2697286" y="3515908"/>
             <a:ext cx="1799687" cy="87625"/>
           </a:xfrm>
           <a:prstGeom prst="rect">
@@ -1565,7 +1565,7 @@
         </p:nvCxnSpPr>
         <p:spPr>
           <a:xfrm flipH="1">
-            <a:off x="5735389" y="4162987"/>
+            <a:off x="3613981" y="4162987"/>
             <a:ext cx="909954" cy="1"/>
           </a:xfrm>
           <a:prstGeom prst="line">
@@ -1588,7 +1588,7 @@
         </p:nvSpPr>
         <p:spPr>
           <a:xfrm>
-            <a:off x="5762350" y="4021438"/>
+            <a:off x="3640942" y="4021438"/>
             <a:ext cx="856031" cy="87625"/>
           </a:xfrm>
           <a:prstGeom prst="rect">
@@ -1630,7 +1630,7 @@
         </p:nvCxnSpPr>
         <p:spPr>
           <a:xfrm flipH="1">
-            <a:off x="4791732" y="4493266"/>
+            <a:off x="2670324" y="4493266"/>
             <a:ext cx="1853611" cy="1"/>
           </a:xfrm>
           <a:prstGeom prst="line">
@@ -1653,7 +1653,7 @@
         </p:nvSpPr>
         <p:spPr>
           <a:xfrm>
-            <a:off x="4818694" y="4351718"/>
+            <a:off x="2697286" y="4351718"/>
             <a:ext cx="1799687" cy="87625"/>
           </a:xfrm>
           <a:prstGeom prst="rect">
@@ -1695,7 +1695,7 @@
         </p:nvCxnSpPr>
         <p:spPr>
           <a:xfrm>
-            <a:off x="4791732" y="4904431"/>
+            <a:off x="2670324" y="4904431"/>
             <a:ext cx="1887313" cy="1"/>
           </a:xfrm>
           <a:prstGeom prst="line">
@@ -1718,7 +1718,7 @@
         </p:nvSpPr>
         <p:spPr>
           <a:xfrm>
-            <a:off x="4818694" y="4762882"/>
+            <a:off x="2697286" y="4762882"/>
             <a:ext cx="1833389" cy="87625"/>
           </a:xfrm>
           <a:prstGeom prst="rect">
@@ -1760,7 +1760,7 @@
         </p:nvCxnSpPr>
         <p:spPr>
           <a:xfrm>
-            <a:off x="4791732" y="5302115"/>
+            <a:off x="2670324" y="5302115"/>
             <a:ext cx="1887313" cy="1"/>
           </a:xfrm>
           <a:prstGeom prst="line">
@@ -1783,7 +1783,7 @@
         </p:nvSpPr>
         <p:spPr>
           <a:xfrm>
-            <a:off x="4818694" y="5160566"/>
+            <a:off x="2697286" y="5160566"/>
             <a:ext cx="1833389" cy="87625"/>
           </a:xfrm>
           <a:prstGeom prst="rect">
@@ -1825,7 +1825,7 @@
         </p:nvCxnSpPr>
         <p:spPr>
           <a:xfrm>
-            <a:off x="3848076" y="5807645"/>
+            <a:off x="1726668" y="5807645"/>
             <a:ext cx="2830969" cy="1"/>
           </a:xfrm>
           <a:prstGeom prst="line">
@@ -1848,7 +1848,7 @@
         </p:nvSpPr>
         <p:spPr>
           <a:xfrm>
-            <a:off x="3875038" y="5666096"/>
+            <a:off x="1753630" y="5666096"/>
             <a:ext cx="2777045" cy="87625"/>
           </a:xfrm>
           <a:prstGeom prst="rect">
@@ -1890,7 +1890,7 @@
         </p:nvSpPr>
         <p:spPr>
           <a:xfrm>
-            <a:off x="3544758" y="1365720"/>
+            <a:off x="1423350" y="1365720"/>
             <a:ext cx="606636" cy="94366"/>
           </a:xfrm>
           <a:prstGeom prst="rect">
@@ -1932,7 +1932,7 @@
         </p:nvSpPr>
         <p:spPr>
           <a:xfrm>
-            <a:off x="3544758" y="6104222"/>
+            <a:off x="1423350" y="6104222"/>
             <a:ext cx="606636" cy="94366"/>
           </a:xfrm>
           <a:prstGeom prst="rect">
@@ -1974,7 +1974,7 @@
         </p:nvSpPr>
         <p:spPr>
           <a:xfrm>
-            <a:off x="4488414" y="1365720"/>
+            <a:off x="2367006" y="1365720"/>
             <a:ext cx="606636" cy="94366"/>
           </a:xfrm>
           <a:prstGeom prst="rect">
@@ -2016,7 +2016,7 @@
         </p:nvSpPr>
         <p:spPr>
           <a:xfrm>
-            <a:off x="4488414" y="6104222"/>
+            <a:off x="2367006" y="6104222"/>
             <a:ext cx="606636" cy="94366"/>
           </a:xfrm>
           <a:prstGeom prst="rect">
@@ -2058,7 +2058,7 @@
         </p:nvSpPr>
         <p:spPr>
           <a:xfrm>
-            <a:off x="5432070" y="1365720"/>
+            <a:off x="3310662" y="1365720"/>
             <a:ext cx="606636" cy="94366"/>
           </a:xfrm>
           <a:prstGeom prst="rect">
@@ -2100,7 +2100,7 @@
         </p:nvSpPr>
         <p:spPr>
           <a:xfrm>
-            <a:off x="5432070" y="6104222"/>
+            <a:off x="3310662" y="6104222"/>
             <a:ext cx="606636" cy="94366"/>
           </a:xfrm>
           <a:prstGeom prst="rect">
@@ -2142,7 +2142,7 @@
         </p:nvSpPr>
         <p:spPr>
           <a:xfrm>
-            <a:off x="6268217" y="1365720"/>
+            <a:off x="4146809" y="1365720"/>
             <a:ext cx="821655" cy="94366"/>
           </a:xfrm>
           <a:prstGeom prst="rect">
@@ -2184,7 +2184,7 @@
         </p:nvSpPr>
         <p:spPr>
           <a:xfrm>
-            <a:off x="6268217" y="6104222"/>
+            <a:off x="4146809" y="6104222"/>
             <a:ext cx="821655" cy="94366"/>
           </a:xfrm>
           <a:prstGeom prst="rect">
@@ -2226,7 +2226,7 @@
         </p:nvSpPr>
         <p:spPr>
           <a:xfrm>
-            <a:off x="7319383" y="3138446"/>
+            <a:off x="5197975" y="3138446"/>
             <a:ext cx="606636" cy="94366"/>
           </a:xfrm>
           <a:prstGeom prst="rect">
@@ -2268,7 +2268,7 @@
         </p:nvSpPr>
         <p:spPr>
           <a:xfrm>
-            <a:off x="7319383" y="6104222"/>
+            <a:off x="5197975" y="6104222"/>
             <a:ext cx="606636" cy="94366"/>
           </a:xfrm>
           <a:prstGeom prst="rect">
@@ -2298,6 +2298,400 @@
                 </a:solidFill>
               </a:rPr>
               <a:t>Mailer</a:t>
+            </a:r>
+          </a:p>
+        </p:txBody>
+      </p:sp>
+      <p:sp>
+        <p:nvSpPr>
+          <p:cNvPr id="4" name="Mermaid source"/>
+          <p:cNvSpPr/>
+          <p:nvPr/>
+        </p:nvSpPr>
+        <p:spPr>
+          <a:xfrm>
+            <a:off x="7674864" y="1028700"/>
+            <a:ext cx="4059936" cy="5372100"/>
+          </a:xfrm>
+          <a:prstGeom prst="rect">
+            <a:avLst/>
+          </a:prstGeom>
+          <a:solidFill>
+            <a:srgbClr val="F3F4F6"/>
+          </a:solidFill>
+          <a:ln w="9525">
+            <a:solidFill>
+              <a:srgbClr val="D1D5DB"/>
+            </a:solidFill>
+          </a:ln>
+        </p:spPr>
+        <p:txBody>
+          <a:bodyPr wrap="square" lIns="91440" tIns="45720" rIns="91440" bIns="45720" anchor="t">
+            <a:noAutofit/>
+          </a:bodyPr>
+          <a:lstStyle/>
+          <a:p>
+            <a:pPr algn="l"/>
+            <a:r>
+              <a:rPr lang="en-US" sz="1150" dirty="0">
+                <a:solidFill>
+                  <a:srgbClr val="1F2937"/>
+                </a:solidFill>
+                <a:latin typeface="Consolas"/>
+                <a:cs typeface="Consolas"/>
+              </a:rPr>
+              <a:t>zenuml</a:t>
+            </a:r>
+          </a:p>
+          <a:p>
+            <a:pPr algn="l"/>
+            <a:r>
+              <a:rPr lang="en-US" sz="1150" dirty="0">
+                <a:solidFill>
+                  <a:srgbClr val="1F2937"/>
+                </a:solidFill>
+                <a:latin typeface="Consolas"/>
+                <a:cs typeface="Consolas"/>
+              </a:rPr>
+              <a:t>    title Booking</a:t>
+            </a:r>
+          </a:p>
+          <a:p>
+            <a:pPr algn="l"/>
+            <a:r>
+              <a:rPr lang="en-US" sz="1150" dirty="0">
+                <a:solidFill>
+                  <a:srgbClr val="1F2937"/>
+                </a:solidFill>
+                <a:latin typeface="Consolas"/>
+                <a:cs typeface="Consolas"/>
+              </a:rPr>
+              <a:t>    @Actor Client</a:t>
+            </a:r>
+          </a:p>
+          <a:p>
+            <a:pPr algn="l"/>
+            <a:r>
+              <a:rPr lang="en-US" sz="1150" dirty="0">
+                <a:solidFill>
+                  <a:srgbClr val="1F2937"/>
+                </a:solidFill>
+                <a:latin typeface="Consolas"/>
+                <a:cs typeface="Consolas"/>
+              </a:rPr>
+              <a:t>    @Database DB</a:t>
+            </a:r>
+          </a:p>
+          <a:p>
+            <a:pPr algn="l"/>
+            <a:r>
+              <a:rPr lang="en-US" sz="1150" dirty="0">
+                <a:solidFill>
+                  <a:srgbClr val="1F2937"/>
+                </a:solidFill>
+                <a:latin typeface="Consolas"/>
+                <a:cs typeface="Consolas"/>
+              </a:rPr>
+              <a:t>    Booking as Booking Service</a:t>
+            </a:r>
+          </a:p>
+          <a:p>
+            <a:pPr algn="l"/>
+            <a:r>
+              <a:rPr lang="en-US" sz="1150" dirty="0">
+                <a:solidFill>
+                  <a:srgbClr val="1F2937"/>
+                </a:solidFill>
+                <a:latin typeface="Consolas"/>
+                <a:cs typeface="Consolas"/>
+              </a:rPr>
+              <a:t>    Client-&gt;Booking.book(id) {</a:t>
+            </a:r>
+          </a:p>
+          <a:p>
+            <a:pPr algn="l"/>
+            <a:r>
+              <a:rPr lang="en-US" sz="1150" dirty="0">
+                <a:solidFill>
+                  <a:srgbClr val="1F2937"/>
+                </a:solidFill>
+                <a:latin typeface="Consolas"/>
+                <a:cs typeface="Consolas"/>
+              </a:rPr>
+              <a:t>      DB.find(id) {</a:t>
+            </a:r>
+          </a:p>
+          <a:p>
+            <a:pPr algn="l"/>
+            <a:r>
+              <a:rPr lang="en-US" sz="1150" dirty="0">
+                <a:solidFill>
+                  <a:srgbClr val="1F2937"/>
+                </a:solidFill>
+                <a:latin typeface="Consolas"/>
+                <a:cs typeface="Consolas"/>
+              </a:rPr>
+              <a:t>        return row</a:t>
+            </a:r>
+          </a:p>
+          <a:p>
+            <a:pPr algn="l"/>
+            <a:r>
+              <a:rPr lang="en-US" sz="1150" dirty="0">
+                <a:solidFill>
+                  <a:srgbClr val="1F2937"/>
+                </a:solidFill>
+                <a:latin typeface="Consolas"/>
+                <a:cs typeface="Consolas"/>
+              </a:rPr>
+              <a:t>      }</a:t>
+            </a:r>
+          </a:p>
+          <a:p>
+            <a:pPr algn="l"/>
+            <a:r>
+              <a:rPr lang="en-US" sz="1150" dirty="0">
+                <a:solidFill>
+                  <a:srgbClr val="1F2937"/>
+                </a:solidFill>
+                <a:latin typeface="Consolas"/>
+                <a:cs typeface="Consolas"/>
+              </a:rPr>
+              <a:t>      if(available) {</a:t>
+            </a:r>
+          </a:p>
+          <a:p>
+            <a:pPr algn="l"/>
+            <a:r>
+              <a:rPr lang="en-US" sz="1150" dirty="0">
+                <a:solidFill>
+                  <a:srgbClr val="1F2937"/>
+                </a:solidFill>
+                <a:latin typeface="Consolas"/>
+                <a:cs typeface="Consolas"/>
+              </a:rPr>
+              <a:t>        order = DB.save(id)</a:t>
+            </a:r>
+          </a:p>
+          <a:p>
+            <a:pPr algn="l"/>
+            <a:r>
+              <a:rPr lang="en-US" sz="1150" dirty="0">
+                <a:solidFill>
+                  <a:srgbClr val="1F2937"/>
+                </a:solidFill>
+                <a:latin typeface="Consolas"/>
+                <a:cs typeface="Consolas"/>
+              </a:rPr>
+              <a:t>        new Mailer(id)</a:t>
+            </a:r>
+          </a:p>
+          <a:p>
+            <a:pPr algn="l"/>
+            <a:r>
+              <a:rPr lang="en-US" sz="1150" dirty="0">
+                <a:solidFill>
+                  <a:srgbClr val="1F2937"/>
+                </a:solidFill>
+                <a:latin typeface="Consolas"/>
+                <a:cs typeface="Consolas"/>
+              </a:rPr>
+              <a:t>      } else {</a:t>
+            </a:r>
+          </a:p>
+          <a:p>
+            <a:pPr algn="l"/>
+            <a:r>
+              <a:rPr lang="en-US" sz="1150" dirty="0">
+                <a:solidFill>
+                  <a:srgbClr val="1F2937"/>
+                </a:solidFill>
+                <a:latin typeface="Consolas"/>
+                <a:cs typeface="Consolas"/>
+              </a:rPr>
+              <a:t>        return sold_out</a:t>
+            </a:r>
+          </a:p>
+          <a:p>
+            <a:pPr algn="l"/>
+            <a:r>
+              <a:rPr lang="en-US" sz="1150" dirty="0">
+                <a:solidFill>
+                  <a:srgbClr val="1F2937"/>
+                </a:solidFill>
+                <a:latin typeface="Consolas"/>
+                <a:cs typeface="Consolas"/>
+              </a:rPr>
+              <a:t>      }</a:t>
+            </a:r>
+          </a:p>
+          <a:p>
+            <a:pPr algn="l"/>
+            <a:r>
+              <a:rPr lang="en-US" sz="1150" dirty="0">
+                <a:solidFill>
+                  <a:srgbClr val="1F2937"/>
+                </a:solidFill>
+                <a:latin typeface="Consolas"/>
+                <a:cs typeface="Consolas"/>
+              </a:rPr>
+              <a:t>      while(retry) {</a:t>
+            </a:r>
+          </a:p>
+          <a:p>
+            <a:pPr algn="l"/>
+            <a:r>
+              <a:rPr lang="en-US" sz="1150" dirty="0">
+                <a:solidFill>
+                  <a:srgbClr val="1F2937"/>
+                </a:solidFill>
+                <a:latin typeface="Consolas"/>
+                <a:cs typeface="Consolas"/>
+              </a:rPr>
+              <a:t>        Booking-&gt;DB: poll</a:t>
+            </a:r>
+          </a:p>
+          <a:p>
+            <a:pPr algn="l"/>
+            <a:r>
+              <a:rPr lang="en-US" sz="1150" dirty="0">
+                <a:solidFill>
+                  <a:srgbClr val="1F2937"/>
+                </a:solidFill>
+                <a:latin typeface="Consolas"/>
+                <a:cs typeface="Consolas"/>
+              </a:rPr>
+              <a:t>      }</a:t>
+            </a:r>
+          </a:p>
+          <a:p>
+            <a:pPr algn="l"/>
+            <a:r>
+              <a:rPr lang="en-US" sz="1150" dirty="0">
+                <a:solidFill>
+                  <a:srgbClr val="1F2937"/>
+                </a:solidFill>
+                <a:latin typeface="Consolas"/>
+                <a:cs typeface="Consolas"/>
+              </a:rPr>
+              <a:t>      return ok</a:t>
+            </a:r>
+          </a:p>
+          <a:p>
+            <a:pPr algn="l"/>
+            <a:r>
+              <a:rPr lang="en-US" sz="1150" dirty="0">
+                <a:solidFill>
+                  <a:srgbClr val="1F2937"/>
+                </a:solidFill>
+                <a:latin typeface="Consolas"/>
+                <a:cs typeface="Consolas"/>
+              </a:rPr>
+              <a:t>    }</a:t>
+            </a:r>
+          </a:p>
+          <a:p>
+            <a:pPr algn="l"/>
+            <a:r>
+              <a:rPr lang="en-US" sz="1150" dirty="0">
+                <a:solidFill>
+                  <a:srgbClr val="1F2937"/>
+                </a:solidFill>
+                <a:latin typeface="Consolas"/>
+                <a:cs typeface="Consolas"/>
+              </a:rPr>
+              <a:t>    try {</a:t>
+            </a:r>
+          </a:p>
+          <a:p>
+            <a:pPr algn="l"/>
+            <a:r>
+              <a:rPr lang="en-US" sz="1150" dirty="0">
+                <a:solidFill>
+                  <a:srgbClr val="1F2937"/>
+                </a:solidFill>
+                <a:latin typeface="Consolas"/>
+                <a:cs typeface="Consolas"/>
+              </a:rPr>
+              <a:t>      Client-&gt;Booking: confirm</a:t>
+            </a:r>
+          </a:p>
+          <a:p>
+            <a:pPr algn="l"/>
+            <a:r>
+              <a:rPr lang="en-US" sz="1150" dirty="0">
+                <a:solidFill>
+                  <a:srgbClr val="1F2937"/>
+                </a:solidFill>
+                <a:latin typeface="Consolas"/>
+                <a:cs typeface="Consolas"/>
+              </a:rPr>
+              <a:t>    } catch {</a:t>
+            </a:r>
+          </a:p>
+          <a:p>
+            <a:pPr algn="l"/>
+            <a:r>
+              <a:rPr lang="en-US" sz="1150" dirty="0">
+                <a:solidFill>
+                  <a:srgbClr val="1F2937"/>
+                </a:solidFill>
+                <a:latin typeface="Consolas"/>
+                <a:cs typeface="Consolas"/>
+              </a:rPr>
+              <a:t>      Client-&gt;Booking: cancel</a:t>
+            </a:r>
+          </a:p>
+          <a:p>
+            <a:pPr algn="l"/>
+            <a:r>
+              <a:rPr lang="en-US" sz="1150" dirty="0">
+                <a:solidFill>
+                  <a:srgbClr val="1F2937"/>
+                </a:solidFill>
+                <a:latin typeface="Consolas"/>
+                <a:cs typeface="Consolas"/>
+              </a:rPr>
+              <a:t>    }</a:t>
+            </a:r>
+          </a:p>
+          <a:p>
+            <a:pPr algn="l"/>
+            <a:r>
+              <a:rPr lang="en-US" sz="1150" dirty="0">
+                <a:solidFill>
+                  <a:srgbClr val="1F2937"/>
+                </a:solidFill>
+                <a:latin typeface="Consolas"/>
+                <a:cs typeface="Consolas"/>
+              </a:rPr>
+              <a:t>    opt {</a:t>
+            </a:r>
+          </a:p>
+          <a:p>
+            <a:pPr algn="l"/>
+            <a:r>
+              <a:rPr lang="en-US" sz="1150" dirty="0">
+                <a:solidFill>
+                  <a:srgbClr val="1F2937"/>
+                </a:solidFill>
+                <a:latin typeface="Consolas"/>
+                <a:cs typeface="Consolas"/>
+              </a:rPr>
+              <a:t>      Booking.audit()</a:t>
+            </a:r>
+          </a:p>
+          <a:p>
+            <a:pPr algn="l"/>
+            <a:r>
+              <a:rPr lang="en-US" sz="1150" dirty="0">
+                <a:solidFill>
+                  <a:srgbClr val="1F2937"/>
+                </a:solidFill>
+                <a:latin typeface="Consolas"/>
+                <a:cs typeface="Consolas"/>
+              </a:rPr>
+              <a:t>    }</a:t>
             </a:r>
           </a:p>
         </p:txBody>
